--- a/template.pptx
+++ b/template.pptx
@@ -111,6 +111,9 @@
     <p:ext uri="{EFAFB233-063F-42B5-8137-9DF3F51BA10A}">
       <p15:sldGuideLst xmlns:p15="http://schemas.microsoft.com/office/powerpoint/2012/main"/>
     </p:ext>
+    <p:ext uri="{2D200454-40CA-4A62-9FC3-DE9A4176ACB9}">
+      <p15:notesGuideLst xmlns:p15="http://schemas.microsoft.com/office/powerpoint/2012/main"/>
+    </p:ext>
   </p:extLst>
 </p:presentation>
 </file>
@@ -209,7 +212,7 @@
           <a:p>
             <a:fld id="{2853ECE8-31BF-4915-8E5C-07975FCFAF5E}" type="datetimeFigureOut">
               <a:rPr lang="zh-CN" altLang="en-US" smtClean="0"/>
-              <a:t>2026/3/13</a:t>
+              <a:t>2026/4/15</a:t>
             </a:fld>
             <a:endParaRPr lang="zh-CN" altLang="en-US"/>
           </a:p>
@@ -344,7 +347,7 @@
           <a:p>
             <a:fld id="{55E6DF0F-4F30-4166-A93F-A7E767D9F449}" type="datetimeFigureOut">
               <a:rPr lang="zh-CN" altLang="en-US" smtClean="0"/>
-              <a:t>2026/3/13</a:t>
+              <a:t>2026/4/15</a:t>
             </a:fld>
             <a:endParaRPr lang="zh-CN" altLang="en-US"/>
           </a:p>
@@ -400,110 +403,6 @@
               <a:rPr lang="zh-CN" altLang="en-US" smtClean="0"/>
               <a:t>‹#›</a:t>
             </a:fld>
-            <a:endParaRPr lang="zh-CN" altLang="en-US"/>
-          </a:p>
-        </p:txBody>
-      </p:sp>
-      <p:sp>
-        <p:nvSpPr>
-          <p:cNvPr id="2" name="矩形 1">
-            <a:extLst>
-              <a:ext uri="{FF2B5EF4-FFF2-40B4-BE49-F238E27FC236}">
-                <a16:creationId xmlns:a16="http://schemas.microsoft.com/office/drawing/2014/main" id="{C1EDDD36-5C8A-7B0E-5555-876B258552A4}"/>
-              </a:ext>
-            </a:extLst>
-          </p:cNvPr>
-          <p:cNvSpPr/>
-          <p:nvPr userDrawn="1"/>
-        </p:nvSpPr>
-        <p:spPr>
-          <a:xfrm>
-            <a:off x="0" y="0"/>
-            <a:ext cx="12192000" cy="249382"/>
-          </a:xfrm>
-          <a:prstGeom prst="rect">
-            <a:avLst/>
-          </a:prstGeom>
-          <a:solidFill>
-            <a:schemeClr val="accent5"/>
-          </a:solidFill>
-          <a:ln>
-            <a:noFill/>
-          </a:ln>
-        </p:spPr>
-        <p:style>
-          <a:lnRef idx="2">
-            <a:schemeClr val="accent1">
-              <a:shade val="15000"/>
-            </a:schemeClr>
-          </a:lnRef>
-          <a:fillRef idx="1">
-            <a:schemeClr val="accent1"/>
-          </a:fillRef>
-          <a:effectRef idx="0">
-            <a:schemeClr val="accent1"/>
-          </a:effectRef>
-          <a:fontRef idx="minor">
-            <a:schemeClr val="lt1"/>
-          </a:fontRef>
-        </p:style>
-        <p:txBody>
-          <a:bodyPr rtlCol="0" anchor="ctr"/>
-          <a:lstStyle/>
-          <a:p>
-            <a:pPr algn="ctr"/>
-            <a:endParaRPr lang="zh-CN" altLang="en-US"/>
-          </a:p>
-        </p:txBody>
-      </p:sp>
-      <p:sp>
-        <p:nvSpPr>
-          <p:cNvPr id="3" name="矩形 2">
-            <a:extLst>
-              <a:ext uri="{FF2B5EF4-FFF2-40B4-BE49-F238E27FC236}">
-                <a16:creationId xmlns:a16="http://schemas.microsoft.com/office/drawing/2014/main" id="{91B52C9B-694A-6C0B-65B3-D62DC451F7B8}"/>
-              </a:ext>
-            </a:extLst>
-          </p:cNvPr>
-          <p:cNvSpPr/>
-          <p:nvPr userDrawn="1"/>
-        </p:nvSpPr>
-        <p:spPr>
-          <a:xfrm>
-            <a:off x="0" y="6608618"/>
-            <a:ext cx="12192000" cy="249382"/>
-          </a:xfrm>
-          <a:prstGeom prst="rect">
-            <a:avLst/>
-          </a:prstGeom>
-          <a:solidFill>
-            <a:schemeClr val="accent5"/>
-          </a:solidFill>
-          <a:ln>
-            <a:noFill/>
-          </a:ln>
-        </p:spPr>
-        <p:style>
-          <a:lnRef idx="2">
-            <a:schemeClr val="accent1">
-              <a:shade val="15000"/>
-            </a:schemeClr>
-          </a:lnRef>
-          <a:fillRef idx="1">
-            <a:schemeClr val="accent1"/>
-          </a:fillRef>
-          <a:effectRef idx="0">
-            <a:schemeClr val="accent1"/>
-          </a:effectRef>
-          <a:fontRef idx="minor">
-            <a:schemeClr val="lt1"/>
-          </a:fontRef>
-        </p:style>
-        <p:txBody>
-          <a:bodyPr rtlCol="0" anchor="ctr"/>
-          <a:lstStyle/>
-          <a:p>
-            <a:pPr algn="ctr"/>
             <a:endParaRPr lang="zh-CN" altLang="en-US"/>
           </a:p>
         </p:txBody>
@@ -662,7 +561,7 @@
           <a:p>
             <a:fld id="{55E6DF0F-4F30-4166-A93F-A7E767D9F449}" type="datetimeFigureOut">
               <a:rPr lang="zh-CN" altLang="en-US" smtClean="0"/>
-              <a:t>2026/3/13</a:t>
+              <a:t>2026/4/15</a:t>
             </a:fld>
             <a:endParaRPr lang="zh-CN" altLang="en-US"/>
           </a:p>
@@ -876,7 +775,7 @@
           <a:p>
             <a:fld id="{55E6DF0F-4F30-4166-A93F-A7E767D9F449}" type="datetimeFigureOut">
               <a:rPr lang="zh-CN" altLang="en-US" smtClean="0"/>
-              <a:t>2026/3/13</a:t>
+              <a:t>2026/4/15</a:t>
             </a:fld>
             <a:endParaRPr lang="zh-CN" altLang="en-US"/>
           </a:p>
@@ -1090,7 +989,7 @@
           <a:p>
             <a:fld id="{55E6DF0F-4F30-4166-A93F-A7E767D9F449}" type="datetimeFigureOut">
               <a:rPr lang="zh-CN" altLang="en-US" smtClean="0"/>
-              <a:t>2026/3/13</a:t>
+              <a:t>2026/4/15</a:t>
             </a:fld>
             <a:endParaRPr lang="zh-CN" altLang="en-US"/>
           </a:p>
@@ -1371,7 +1270,7 @@
           <a:p>
             <a:fld id="{55E6DF0F-4F30-4166-A93F-A7E767D9F449}" type="datetimeFigureOut">
               <a:rPr lang="zh-CN" altLang="en-US" smtClean="0"/>
-              <a:t>2026/3/13</a:t>
+              <a:t>2026/4/15</a:t>
             </a:fld>
             <a:endParaRPr lang="zh-CN" altLang="en-US"/>
           </a:p>
@@ -1650,7 +1549,7 @@
           <a:p>
             <a:fld id="{55E6DF0F-4F30-4166-A93F-A7E767D9F449}" type="datetimeFigureOut">
               <a:rPr lang="zh-CN" altLang="en-US" smtClean="0"/>
-              <a:t>2026/3/13</a:t>
+              <a:t>2026/4/15</a:t>
             </a:fld>
             <a:endParaRPr lang="zh-CN" altLang="en-US"/>
           </a:p>
@@ -2077,7 +1976,7 @@
           <a:p>
             <a:fld id="{55E6DF0F-4F30-4166-A93F-A7E767D9F449}" type="datetimeFigureOut">
               <a:rPr lang="zh-CN" altLang="en-US" smtClean="0"/>
-              <a:t>2026/3/13</a:t>
+              <a:t>2026/4/15</a:t>
             </a:fld>
             <a:endParaRPr lang="zh-CN" altLang="en-US"/>
           </a:p>
@@ -2226,7 +2125,7 @@
           <a:p>
             <a:fld id="{55E6DF0F-4F30-4166-A93F-A7E767D9F449}" type="datetimeFigureOut">
               <a:rPr lang="zh-CN" altLang="en-US" smtClean="0"/>
-              <a:t>2026/3/13</a:t>
+              <a:t>2026/4/15</a:t>
             </a:fld>
             <a:endParaRPr lang="zh-CN" altLang="en-US"/>
           </a:p>
@@ -2339,7 +2238,7 @@
           <a:p>
             <a:fld id="{55E6DF0F-4F30-4166-A93F-A7E767D9F449}" type="datetimeFigureOut">
               <a:rPr lang="zh-CN" altLang="en-US" smtClean="0"/>
-              <a:t>2026/3/13</a:t>
+              <a:t>2026/4/15</a:t>
             </a:fld>
             <a:endParaRPr lang="zh-CN" altLang="en-US"/>
           </a:p>
@@ -2659,7 +2558,7 @@
           <a:p>
             <a:fld id="{55E6DF0F-4F30-4166-A93F-A7E767D9F449}" type="datetimeFigureOut">
               <a:rPr lang="zh-CN" altLang="en-US" smtClean="0"/>
-              <a:t>2026/3/13</a:t>
+              <a:t>2026/4/15</a:t>
             </a:fld>
             <a:endParaRPr lang="zh-CN" altLang="en-US"/>
           </a:p>
@@ -2956,7 +2855,7 @@
           <a:p>
             <a:fld id="{55E6DF0F-4F30-4166-A93F-A7E767D9F449}" type="datetimeFigureOut">
               <a:rPr lang="zh-CN" altLang="en-US" smtClean="0"/>
-              <a:t>2026/3/13</a:t>
+              <a:t>2026/4/15</a:t>
             </a:fld>
             <a:endParaRPr lang="zh-CN" altLang="en-US"/>
           </a:p>
@@ -3092,7 +2991,7 @@
           <a:p>
             <a:fld id="{55E6DF0F-4F30-4166-A93F-A7E767D9F449}" type="datetimeFigureOut">
               <a:rPr lang="zh-CN" altLang="en-US" smtClean="0"/>
-              <a:t>2026/3/13</a:t>
+              <a:t>2026/4/15</a:t>
             </a:fld>
             <a:endParaRPr lang="zh-CN" altLang="en-US"/>
           </a:p>
